--- a/class/cloud_infra_mgmt/13주차_통합실습1/01_강의자료/3차시_E2E배포테스트와트러블슈팅.pptx
+++ b/class/cloud_infra_mgmt/13주차_통합실습1/01_강의자료/3차시_E2E배포테스트와트러블슈팅.pptx
@@ -5325,7 +5325,7 @@
           <a:p>
             <a:pPr>
               <a:lnSpc>
-                <a:spcPct val="115000"/>
+                <a:spcPct val="149500"/>
               </a:lnSpc>
             </a:pPr>
             <a:r>
@@ -5350,7 +5350,7 @@
           <a:p>
             <a:pPr>
               <a:lnSpc>
-                <a:spcPct val="115000"/>
+                <a:spcPct val="149500"/>
               </a:lnSpc>
             </a:pPr>
             <a:r>
@@ -5375,7 +5375,7 @@
           <a:p>
             <a:pPr>
               <a:lnSpc>
-                <a:spcPct val="115000"/>
+                <a:spcPct val="149500"/>
               </a:lnSpc>
             </a:pPr>
             <a:r>
@@ -5766,7 +5766,7 @@
           <a:p>
             <a:pPr>
               <a:lnSpc>
-                <a:spcPct val="115000"/>
+                <a:spcPct val="149500"/>
               </a:lnSpc>
             </a:pPr>
             <a:r>
@@ -5791,7 +5791,7 @@
           <a:p>
             <a:pPr>
               <a:lnSpc>
-                <a:spcPct val="115000"/>
+                <a:spcPct val="149500"/>
               </a:lnSpc>
             </a:pPr>
             <a:r>
@@ -5816,7 +5816,7 @@
           <a:p>
             <a:pPr>
               <a:lnSpc>
-                <a:spcPct val="115000"/>
+                <a:spcPct val="149500"/>
               </a:lnSpc>
             </a:pPr>
             <a:r>
@@ -5841,7 +5841,7 @@
           <a:p>
             <a:pPr>
               <a:lnSpc>
-                <a:spcPct val="115000"/>
+                <a:spcPct val="149500"/>
               </a:lnSpc>
             </a:pPr>
             <a:r>
@@ -7349,16 +7349,60 @@
       </p:sp>
       <p:sp>
         <p:nvSpPr>
-          <p:cNvPr id="7" name="Isosceles Triangle 6"/>
+          <p:cNvPr id="7" name="Rectangle 6"/>
           <p:cNvSpPr/>
           <p:nvPr/>
         </p:nvSpPr>
         <p:spPr>
-          <a:xfrm rot="5400000">
-            <a:off x="4423409" y="1673352"/>
-            <a:ext cx="146304" cy="146304"/>
-          </a:xfrm>
-          <a:prstGeom prst="triangle">
+          <a:xfrm>
+            <a:off x="6359651" y="1730959"/>
+            <a:ext cx="2665476" cy="31089"/>
+          </a:xfrm>
+          <a:prstGeom prst="rect">
+            <a:avLst/>
+          </a:prstGeom>
+          <a:solidFill>
+            <a:srgbClr val="14B8A6"/>
+          </a:solidFill>
+          <a:ln>
+            <a:noFill/>
+          </a:ln>
+          <a:effectLst/>
+        </p:spPr>
+        <p:style>
+          <a:lnRef idx="1">
+            <a:schemeClr val="accent1"/>
+          </a:lnRef>
+          <a:fillRef idx="3">
+            <a:schemeClr val="accent1"/>
+          </a:fillRef>
+          <a:effectRef idx="2">
+            <a:schemeClr val="accent1"/>
+          </a:effectRef>
+          <a:fontRef idx="minor">
+            <a:schemeClr val="lt1"/>
+          </a:fontRef>
+        </p:style>
+        <p:txBody>
+          <a:bodyPr rtlCol="0" anchor="ctr"/>
+          <a:lstStyle/>
+          <a:p>
+            <a:pPr algn="ctr"/>
+          </a:p>
+        </p:txBody>
+      </p:sp>
+      <p:sp>
+        <p:nvSpPr>
+          <p:cNvPr id="8" name="Oval 7"/>
+          <p:cNvSpPr/>
+          <p:nvPr/>
+        </p:nvSpPr>
+        <p:spPr>
+          <a:xfrm>
+            <a:off x="2633472" y="1481328"/>
+            <a:ext cx="530352" cy="530352"/>
+          </a:xfrm>
+          <a:prstGeom prst="ellipse">
             <a:avLst/>
           </a:prstGeom>
           <a:solidFill>
@@ -7393,139 +7437,7 @@
       </p:sp>
       <p:sp>
         <p:nvSpPr>
-          <p:cNvPr id="8" name="Rectangle 7"/>
-          <p:cNvSpPr/>
-          <p:nvPr/>
-        </p:nvSpPr>
-        <p:spPr>
-          <a:xfrm>
-            <a:off x="6359651" y="1730959"/>
-            <a:ext cx="2665476" cy="31089"/>
-          </a:xfrm>
-          <a:prstGeom prst="rect">
-            <a:avLst/>
-          </a:prstGeom>
-          <a:solidFill>
-            <a:srgbClr val="14B8A6"/>
-          </a:solidFill>
-          <a:ln>
-            <a:noFill/>
-          </a:ln>
-          <a:effectLst/>
-        </p:spPr>
-        <p:style>
-          <a:lnRef idx="1">
-            <a:schemeClr val="accent1"/>
-          </a:lnRef>
-          <a:fillRef idx="3">
-            <a:schemeClr val="accent1"/>
-          </a:fillRef>
-          <a:effectRef idx="2">
-            <a:schemeClr val="accent1"/>
-          </a:effectRef>
-          <a:fontRef idx="minor">
-            <a:schemeClr val="lt1"/>
-          </a:fontRef>
-        </p:style>
-        <p:txBody>
-          <a:bodyPr rtlCol="0" anchor="ctr"/>
-          <a:lstStyle/>
-          <a:p>
-            <a:pPr algn="ctr"/>
-          </a:p>
-        </p:txBody>
-      </p:sp>
-      <p:sp>
-        <p:nvSpPr>
-          <p:cNvPr id="9" name="Isosceles Triangle 8"/>
-          <p:cNvSpPr/>
-          <p:nvPr/>
-        </p:nvSpPr>
-        <p:spPr>
-          <a:xfrm rot="5400000">
-            <a:off x="7619238" y="1673352"/>
-            <a:ext cx="146304" cy="146304"/>
-          </a:xfrm>
-          <a:prstGeom prst="triangle">
-            <a:avLst/>
-          </a:prstGeom>
-          <a:solidFill>
-            <a:srgbClr val="0D9488"/>
-          </a:solidFill>
-          <a:ln>
-            <a:noFill/>
-          </a:ln>
-          <a:effectLst/>
-        </p:spPr>
-        <p:style>
-          <a:lnRef idx="1">
-            <a:schemeClr val="accent1"/>
-          </a:lnRef>
-          <a:fillRef idx="3">
-            <a:schemeClr val="accent1"/>
-          </a:fillRef>
-          <a:effectRef idx="2">
-            <a:schemeClr val="accent1"/>
-          </a:effectRef>
-          <a:fontRef idx="minor">
-            <a:schemeClr val="lt1"/>
-          </a:fontRef>
-        </p:style>
-        <p:txBody>
-          <a:bodyPr rtlCol="0" anchor="ctr"/>
-          <a:lstStyle/>
-          <a:p>
-            <a:pPr algn="ctr"/>
-          </a:p>
-        </p:txBody>
-      </p:sp>
-      <p:sp>
-        <p:nvSpPr>
-          <p:cNvPr id="10" name="Oval 9"/>
-          <p:cNvSpPr/>
-          <p:nvPr/>
-        </p:nvSpPr>
-        <p:spPr>
-          <a:xfrm>
-            <a:off x="2633472" y="1481328"/>
-            <a:ext cx="530352" cy="530352"/>
-          </a:xfrm>
-          <a:prstGeom prst="ellipse">
-            <a:avLst/>
-          </a:prstGeom>
-          <a:solidFill>
-            <a:srgbClr val="0D9488"/>
-          </a:solidFill>
-          <a:ln>
-            <a:noFill/>
-          </a:ln>
-          <a:effectLst/>
-        </p:spPr>
-        <p:style>
-          <a:lnRef idx="1">
-            <a:schemeClr val="accent1"/>
-          </a:lnRef>
-          <a:fillRef idx="3">
-            <a:schemeClr val="accent1"/>
-          </a:fillRef>
-          <a:effectRef idx="2">
-            <a:schemeClr val="accent1"/>
-          </a:effectRef>
-          <a:fontRef idx="minor">
-            <a:schemeClr val="lt1"/>
-          </a:fontRef>
-        </p:style>
-        <p:txBody>
-          <a:bodyPr rtlCol="0" anchor="ctr"/>
-          <a:lstStyle/>
-          <a:p>
-            <a:pPr algn="ctr"/>
-          </a:p>
-        </p:txBody>
-      </p:sp>
-      <p:sp>
-        <p:nvSpPr>
-          <p:cNvPr id="11" name="TextBox 10"/>
+          <p:cNvPr id="9" name="TextBox 8"/>
           <p:cNvSpPr txBox="1"/>
           <p:nvPr/>
         </p:nvSpPr>
@@ -7560,7 +7472,7 @@
       </p:sp>
       <p:sp>
         <p:nvSpPr>
-          <p:cNvPr id="12" name="Rounded Rectangle 11"/>
+          <p:cNvPr id="10" name="Rounded Rectangle 9"/>
           <p:cNvSpPr/>
           <p:nvPr/>
         </p:nvSpPr>
@@ -7608,7 +7520,7 @@
       </p:sp>
       <p:sp>
         <p:nvSpPr>
-          <p:cNvPr id="13" name="TextBox 12"/>
+          <p:cNvPr id="11" name="TextBox 10"/>
           <p:cNvSpPr txBox="1"/>
           <p:nvPr/>
         </p:nvSpPr>
@@ -7643,7 +7555,7 @@
       </p:sp>
       <p:sp>
         <p:nvSpPr>
-          <p:cNvPr id="14" name="TextBox 13"/>
+          <p:cNvPr id="12" name="TextBox 11"/>
           <p:cNvSpPr txBox="1"/>
           <p:nvPr/>
         </p:nvSpPr>
@@ -7682,7 +7594,7 @@
       </p:sp>
       <p:sp>
         <p:nvSpPr>
-          <p:cNvPr id="15" name="Oval 14"/>
+          <p:cNvPr id="13" name="Oval 12"/>
           <p:cNvSpPr/>
           <p:nvPr/>
         </p:nvSpPr>
@@ -7726,7 +7638,7 @@
       </p:sp>
       <p:sp>
         <p:nvSpPr>
-          <p:cNvPr id="16" name="TextBox 15"/>
+          <p:cNvPr id="14" name="TextBox 13"/>
           <p:cNvSpPr txBox="1"/>
           <p:nvPr/>
         </p:nvSpPr>
@@ -7761,7 +7673,7 @@
       </p:sp>
       <p:sp>
         <p:nvSpPr>
-          <p:cNvPr id="17" name="Rounded Rectangle 16"/>
+          <p:cNvPr id="15" name="Rounded Rectangle 14"/>
           <p:cNvSpPr/>
           <p:nvPr/>
         </p:nvSpPr>
@@ -7809,7 +7721,7 @@
       </p:sp>
       <p:sp>
         <p:nvSpPr>
-          <p:cNvPr id="18" name="TextBox 17"/>
+          <p:cNvPr id="16" name="TextBox 15"/>
           <p:cNvSpPr txBox="1"/>
           <p:nvPr/>
         </p:nvSpPr>
@@ -7844,7 +7756,7 @@
       </p:sp>
       <p:sp>
         <p:nvSpPr>
-          <p:cNvPr id="19" name="TextBox 18"/>
+          <p:cNvPr id="17" name="TextBox 16"/>
           <p:cNvSpPr txBox="1"/>
           <p:nvPr/>
         </p:nvSpPr>
@@ -7883,7 +7795,7 @@
       </p:sp>
       <p:sp>
         <p:nvSpPr>
-          <p:cNvPr id="20" name="Oval 19"/>
+          <p:cNvPr id="18" name="Oval 17"/>
           <p:cNvSpPr/>
           <p:nvPr/>
         </p:nvSpPr>
@@ -7927,7 +7839,7 @@
       </p:sp>
       <p:sp>
         <p:nvSpPr>
-          <p:cNvPr id="21" name="TextBox 20"/>
+          <p:cNvPr id="19" name="TextBox 18"/>
           <p:cNvSpPr txBox="1"/>
           <p:nvPr/>
         </p:nvSpPr>
@@ -7962,7 +7874,7 @@
       </p:sp>
       <p:sp>
         <p:nvSpPr>
-          <p:cNvPr id="22" name="Rounded Rectangle 21"/>
+          <p:cNvPr id="20" name="Rounded Rectangle 19"/>
           <p:cNvSpPr/>
           <p:nvPr/>
         </p:nvSpPr>
@@ -8010,7 +7922,7 @@
       </p:sp>
       <p:sp>
         <p:nvSpPr>
-          <p:cNvPr id="23" name="TextBox 22"/>
+          <p:cNvPr id="21" name="TextBox 20"/>
           <p:cNvSpPr txBox="1"/>
           <p:nvPr/>
         </p:nvSpPr>
@@ -8045,7 +7957,7 @@
       </p:sp>
       <p:sp>
         <p:nvSpPr>
-          <p:cNvPr id="24" name="TextBox 23"/>
+          <p:cNvPr id="22" name="TextBox 21"/>
           <p:cNvSpPr txBox="1"/>
           <p:nvPr/>
         </p:nvSpPr>
@@ -8084,7 +7996,7 @@
       </p:sp>
       <p:sp>
         <p:nvSpPr>
-          <p:cNvPr id="25" name="TextBox 24"/>
+          <p:cNvPr id="23" name="TextBox 22"/>
           <p:cNvSpPr txBox="1"/>
           <p:nvPr/>
         </p:nvSpPr>
@@ -8119,7 +8031,7 @@
       </p:sp>
       <p:sp>
         <p:nvSpPr>
-          <p:cNvPr id="26" name="TextBox 25"/>
+          <p:cNvPr id="24" name="TextBox 23"/>
           <p:cNvSpPr txBox="1"/>
           <p:nvPr/>
         </p:nvSpPr>
@@ -8154,7 +8066,7 @@
       </p:sp>
       <p:sp>
         <p:nvSpPr>
-          <p:cNvPr id="27" name="Rectangle 26"/>
+          <p:cNvPr id="25" name="Rectangle 24"/>
           <p:cNvSpPr/>
           <p:nvPr/>
         </p:nvSpPr>
@@ -8678,7 +8590,7 @@
           <a:p>
             <a:pPr>
               <a:lnSpc>
-                <a:spcPct val="115000"/>
+                <a:spcPct val="149500"/>
               </a:lnSpc>
             </a:pPr>
             <a:r>
@@ -8703,7 +8615,7 @@
           <a:p>
             <a:pPr>
               <a:lnSpc>
-                <a:spcPct val="115000"/>
+                <a:spcPct val="149500"/>
               </a:lnSpc>
             </a:pPr>
             <a:r>
@@ -8728,7 +8640,7 @@
           <a:p>
             <a:pPr>
               <a:lnSpc>
-                <a:spcPct val="115000"/>
+                <a:spcPct val="149500"/>
               </a:lnSpc>
             </a:pPr>
             <a:r>
@@ -10595,7 +10507,7 @@
           <a:p>
             <a:pPr>
               <a:lnSpc>
-                <a:spcPct val="115000"/>
+                <a:spcPct val="149500"/>
               </a:lnSpc>
             </a:pPr>
             <a:r>
@@ -10620,7 +10532,7 @@
           <a:p>
             <a:pPr>
               <a:lnSpc>
-                <a:spcPct val="115000"/>
+                <a:spcPct val="149500"/>
               </a:lnSpc>
             </a:pPr>
             <a:r>
@@ -10645,7 +10557,7 @@
           <a:p>
             <a:pPr>
               <a:lnSpc>
-                <a:spcPct val="115000"/>
+                <a:spcPct val="149500"/>
               </a:lnSpc>
             </a:pPr>
             <a:r>
@@ -11036,7 +10948,7 @@
           <a:p>
             <a:pPr>
               <a:lnSpc>
-                <a:spcPct val="115000"/>
+                <a:spcPct val="149500"/>
               </a:lnSpc>
             </a:pPr>
             <a:r>
@@ -11061,7 +10973,7 @@
           <a:p>
             <a:pPr>
               <a:lnSpc>
-                <a:spcPct val="115000"/>
+                <a:spcPct val="149500"/>
               </a:lnSpc>
             </a:pPr>
             <a:r>
@@ -11086,7 +10998,7 @@
           <a:p>
             <a:pPr>
               <a:lnSpc>
-                <a:spcPct val="115000"/>
+                <a:spcPct val="149500"/>
               </a:lnSpc>
             </a:pPr>
             <a:r>
@@ -11111,7 +11023,7 @@
           <a:p>
             <a:pPr>
               <a:lnSpc>
-                <a:spcPct val="115000"/>
+                <a:spcPct val="149500"/>
               </a:lnSpc>
             </a:pPr>
             <a:r>

--- a/class/cloud_infra_mgmt/13주차_통합실습1/01_강의자료/3차시_E2E배포테스트와트러블슈팅.pptx
+++ b/class/cloud_infra_mgmt/13주차_통합실습1/01_강의자료/3차시_E2E배포테스트와트러블슈팅.pptx
@@ -4961,6 +4961,8 @@
                   <a:srgbClr val="14B8A6"/>
                 </a:solidFill>
                 <a:latin typeface="맑은 고딕"/>
+                <a:ea typeface="맑은 고딕"/>
+                <a:cs typeface="맑은 고딕"/>
               </a:rPr>
               <a:t>클라우드인프라관리  ·  13주차 3차시 [VM 전용]</a:t>
             </a:r>
@@ -4996,6 +4998,8 @@
                   <a:srgbClr val="FFFFFF"/>
                 </a:solidFill>
                 <a:latin typeface="맑은 고딕"/>
+                <a:ea typeface="맑은 고딕"/>
+                <a:cs typeface="맑은 고딕"/>
               </a:rPr>
               <a:t>End-to-End 배포 테스트와 트러블슈팅</a:t>
             </a:r>
@@ -5031,6 +5035,8 @@
                   <a:srgbClr val="C9D3E6"/>
                 </a:solidFill>
                 <a:latin typeface="맑은 고딕"/>
+                <a:ea typeface="맑은 고딕"/>
+                <a:cs typeface="맑은 고딕"/>
               </a:rPr>
               <a:t>코드 한 줄 수정 → 자동으로 서비스에 반영되는 순간</a:t>
             </a:r>
@@ -5066,6 +5072,8 @@
                   <a:srgbClr val="FFFFFF"/>
                 </a:solidFill>
                 <a:latin typeface="맑은 고딕"/>
+                <a:ea typeface="맑은 고딕"/>
+                <a:cs typeface="맑은 고딕"/>
               </a:rPr>
               <a:t>영남이공대학교 김지윤교수</a:t>
             </a:r>
@@ -5225,6 +5233,8 @@
                   <a:srgbClr val="14213D"/>
                 </a:solidFill>
                 <a:latin typeface="맑은 고딕"/>
+                <a:ea typeface="맑은 고딕"/>
+                <a:cs typeface="맑은 고딕"/>
               </a:rPr>
               <a:t>03</a:t>
             </a:r>
@@ -5260,6 +5270,8 @@
                   <a:srgbClr val="14B8A6"/>
                 </a:solidFill>
                 <a:latin typeface="맑은 고딕"/>
+                <a:ea typeface="맑은 고딕"/>
+                <a:cs typeface="맑은 고딕"/>
               </a:rPr>
               <a:t>실습 안내</a:t>
             </a:r>
@@ -5295,6 +5307,8 @@
                   <a:srgbClr val="FFFFFF"/>
                 </a:solidFill>
                 <a:latin typeface="맑은 고딕"/>
+                <a:ea typeface="맑은 고딕"/>
+                <a:cs typeface="맑은 고딕"/>
               </a:rPr>
               <a:t>VM 실습 — 문제 발생 시 대응</a:t>
             </a:r>
@@ -5334,6 +5348,8 @@
                   <a:srgbClr val="0D9488"/>
                 </a:solidFill>
                 <a:latin typeface="맑은 고딕"/>
+                <a:ea typeface="맑은 고딕"/>
+                <a:cs typeface="맑은 고딕"/>
               </a:rPr>
               <a:t>●  </a:t>
             </a:r>
@@ -5343,6 +5359,8 @@
                   <a:srgbClr val="222733"/>
                 </a:solidFill>
                 <a:latin typeface="맑은 고딕"/>
+                <a:ea typeface="맑은 고딕"/>
+                <a:cs typeface="맑은 고딕"/>
               </a:rPr>
               <a:t>실패한 stage를 확인하고, 위 체크리스트를 참고해 원인부터 좁혀나가기</a:t>
             </a:r>
@@ -5359,6 +5377,8 @@
                   <a:srgbClr val="0D9488"/>
                 </a:solidFill>
                 <a:latin typeface="맑은 고딕"/>
+                <a:ea typeface="맑은 고딕"/>
+                <a:cs typeface="맑은 고딕"/>
               </a:rPr>
               <a:t>●  </a:t>
             </a:r>
@@ -5368,6 +5388,8 @@
                   <a:srgbClr val="222733"/>
                 </a:solidFill>
                 <a:latin typeface="맑은 고딕"/>
+                <a:ea typeface="맑은 고딕"/>
+                <a:cs typeface="맑은 고딕"/>
               </a:rPr>
               <a:t>docker ps, kubectl get pods, kubectl describe pod 등으로 실제 상태 직접 확인</a:t>
             </a:r>
@@ -5384,6 +5406,8 @@
                   <a:srgbClr val="0D9488"/>
                 </a:solidFill>
                 <a:latin typeface="맑은 고딕"/>
+                <a:ea typeface="맑은 고딕"/>
+                <a:cs typeface="맑은 고딕"/>
               </a:rPr>
               <a:t>●  </a:t>
             </a:r>
@@ -5393,6 +5417,8 @@
                   <a:srgbClr val="222733"/>
                 </a:solidFill>
                 <a:latin typeface="맑은 고딕"/>
+                <a:ea typeface="맑은 고딕"/>
+                <a:cs typeface="맑은 고딕"/>
               </a:rPr>
               <a:t>해결되면 다시 코드를 수정해 git push로 재검증 — 이 과정 자체가 실전 트러블슈팅</a:t>
             </a:r>
@@ -5428,6 +5454,8 @@
                   <a:srgbClr val="5B6373"/>
                 </a:solidFill>
                 <a:latin typeface="맑은 고딕"/>
+                <a:ea typeface="맑은 고딕"/>
+                <a:cs typeface="맑은 고딕"/>
               </a:rPr>
               <a:t>클라우드인프라관리  ·  13주차 3차시 [VM 전용]</a:t>
             </a:r>
@@ -5463,6 +5491,8 @@
                   <a:srgbClr val="5B6373"/>
                 </a:solidFill>
                 <a:latin typeface="맑은 고딕"/>
+                <a:ea typeface="맑은 고딕"/>
+                <a:cs typeface="맑은 고딕"/>
               </a:rPr>
               <a:t>10 / 13</a:t>
             </a:r>
@@ -5666,6 +5696,8 @@
                   <a:srgbClr val="14213D"/>
                 </a:solidFill>
                 <a:latin typeface="맑은 고딕"/>
+                <a:ea typeface="맑은 고딕"/>
+                <a:cs typeface="맑은 고딕"/>
               </a:rPr>
               <a:t>03</a:t>
             </a:r>
@@ -5701,6 +5733,8 @@
                   <a:srgbClr val="14B8A6"/>
                 </a:solidFill>
                 <a:latin typeface="맑은 고딕"/>
+                <a:ea typeface="맑은 고딕"/>
+                <a:cs typeface="맑은 고딕"/>
               </a:rPr>
               <a:t>실습 안내</a:t>
             </a:r>
@@ -5736,6 +5770,8 @@
                   <a:srgbClr val="FFFFFF"/>
                 </a:solidFill>
                 <a:latin typeface="맑은 고딕"/>
+                <a:ea typeface="맑은 고딕"/>
+                <a:cs typeface="맑은 고딕"/>
               </a:rPr>
               <a:t>결과 정리 및 13주차 종합 제출</a:t>
             </a:r>
@@ -5775,6 +5811,8 @@
                   <a:srgbClr val="0D9488"/>
                 </a:solidFill>
                 <a:latin typeface="맑은 고딕"/>
+                <a:ea typeface="맑은 고딕"/>
+                <a:cs typeface="맑은 고딕"/>
               </a:rPr>
               <a:t>●  </a:t>
             </a:r>
@@ -5784,6 +5822,8 @@
                   <a:srgbClr val="222733"/>
                 </a:solidFill>
                 <a:latin typeface="맑은 고딕"/>
+                <a:ea typeface="맑은 고딕"/>
+                <a:cs typeface="맑은 고딕"/>
               </a:rPr>
               <a:t>코드 수정 전/후 챗봇 응답 curl 결과 캡처(변경 확인)</a:t>
             </a:r>
@@ -5800,6 +5840,8 @@
                   <a:srgbClr val="0D9488"/>
                 </a:solidFill>
                 <a:latin typeface="맑은 고딕"/>
+                <a:ea typeface="맑은 고딕"/>
+                <a:cs typeface="맑은 고딕"/>
               </a:rPr>
               <a:t>●  </a:t>
             </a:r>
@@ -5809,6 +5851,8 @@
                   <a:srgbClr val="222733"/>
                 </a:solidFill>
                 <a:latin typeface="맑은 고딕"/>
+                <a:ea typeface="맑은 고딕"/>
+                <a:cs typeface="맑은 고딕"/>
               </a:rPr>
               <a:t>Jenkins Build History에서 자동 트리거된 빌드 이력 캡처</a:t>
             </a:r>
@@ -5825,6 +5869,8 @@
                   <a:srgbClr val="0D9488"/>
                 </a:solidFill>
                 <a:latin typeface="맑은 고딕"/>
+                <a:ea typeface="맑은 고딕"/>
+                <a:cs typeface="맑은 고딕"/>
               </a:rPr>
               <a:t>●  </a:t>
             </a:r>
@@ -5834,6 +5880,8 @@
                   <a:srgbClr val="222733"/>
                 </a:solidFill>
                 <a:latin typeface="맑은 고딕"/>
+                <a:ea typeface="맑은 고딕"/>
+                <a:cs typeface="맑은 고딕"/>
               </a:rPr>
               <a:t>13주차 1~3차시(아키텍처 설계·구축·E2E 테스트) 실습을 종합해서 제출</a:t>
             </a:r>
@@ -5850,6 +5898,8 @@
                   <a:srgbClr val="0D9488"/>
                 </a:solidFill>
                 <a:latin typeface="맑은 고딕"/>
+                <a:ea typeface="맑은 고딕"/>
+                <a:cs typeface="맑은 고딕"/>
               </a:rPr>
               <a:t>●  </a:t>
             </a:r>
@@ -5859,6 +5909,8 @@
                   <a:srgbClr val="222733"/>
                 </a:solidFill>
                 <a:latin typeface="맑은 고딕"/>
+                <a:ea typeface="맑은 고딕"/>
+                <a:cs typeface="맑은 고딕"/>
               </a:rPr>
               <a:t>겪었던 트러블슈팅 사례 1가지 이상을 원인·해결 방법과 함께 기록</a:t>
             </a:r>
@@ -5894,6 +5946,8 @@
                   <a:srgbClr val="5B6373"/>
                 </a:solidFill>
                 <a:latin typeface="맑은 고딕"/>
+                <a:ea typeface="맑은 고딕"/>
+                <a:cs typeface="맑은 고딕"/>
               </a:rPr>
               <a:t>클라우드인프라관리  ·  13주차 3차시 [VM 전용]</a:t>
             </a:r>
@@ -5929,6 +5983,8 @@
                   <a:srgbClr val="5B6373"/>
                 </a:solidFill>
                 <a:latin typeface="맑은 고딕"/>
+                <a:ea typeface="맑은 고딕"/>
+                <a:cs typeface="맑은 고딕"/>
               </a:rPr>
               <a:t>11 / 13</a:t>
             </a:r>
@@ -6114,6 +6170,8 @@
                   <a:srgbClr val="FFFFFF"/>
                 </a:solidFill>
                 <a:latin typeface="맑은 고딕"/>
+                <a:ea typeface="맑은 고딕"/>
+                <a:cs typeface="맑은 고딕"/>
               </a:rPr>
               <a:t>오늘의 정리</a:t>
             </a:r>
@@ -6167,6 +6225,8 @@
                   <a:srgbClr val="14213D"/>
                 </a:solidFill>
                 <a:latin typeface="맑은 고딕"/>
+                <a:ea typeface="맑은 고딕"/>
+                <a:cs typeface="맑은 고딕"/>
               </a:rPr>
               <a:t>1</a:t>
             </a:r>
@@ -6202,6 +6262,8 @@
                   <a:srgbClr val="FFFFFF"/>
                 </a:solidFill>
                 <a:latin typeface="맑은 고딕"/>
+                <a:ea typeface="맑은 고딕"/>
+                <a:cs typeface="맑은 고딕"/>
               </a:rPr>
               <a:t>코드 수정 → git push만으로 Build부터 Deploy까지 전 과정이 자동으로 실행되는 것을 확인했다</a:t>
             </a:r>
@@ -6255,6 +6317,8 @@
                   <a:srgbClr val="14213D"/>
                 </a:solidFill>
                 <a:latin typeface="맑은 고딕"/>
+                <a:ea typeface="맑은 고딕"/>
+                <a:cs typeface="맑은 고딕"/>
               </a:rPr>
               <a:t>2</a:t>
             </a:r>
@@ -6290,6 +6354,8 @@
                   <a:srgbClr val="FFFFFF"/>
                 </a:solidFill>
                 <a:latin typeface="맑은 고딕"/>
+                <a:ea typeface="맑은 고딕"/>
+                <a:cs typeface="맑은 고딕"/>
               </a:rPr>
               <a:t>트러블슈팅은 Console Output과 Stage View로 실패 지점을 좁히고, 실제 명령을 손으로 재현해 원인을 찾는 순서로 진행한다</a:t>
             </a:r>
@@ -6431,6 +6497,8 @@
                   <a:srgbClr val="FFFFFF"/>
                 </a:solidFill>
                 <a:latin typeface="맑은 고딕"/>
+                <a:ea typeface="맑은 고딕"/>
+                <a:cs typeface="맑은 고딕"/>
               </a:rPr>
               <a:t>다음 주 예고</a:t>
             </a:r>
@@ -6466,6 +6534,8 @@
                   <a:srgbClr val="14B8A6"/>
                 </a:solidFill>
                 <a:latin typeface="맑은 고딕"/>
+                <a:ea typeface="맑은 고딕"/>
+                <a:cs typeface="맑은 고딕"/>
               </a:rPr>
               <a:t>다음 차시 예고 — 14주차 — HPA 오토스케일링과 자가치유 운영</a:t>
             </a:r>
@@ -6501,6 +6571,8 @@
                   <a:srgbClr val="FFFFFF"/>
                 </a:solidFill>
                 <a:latin typeface="맑은 고딕"/>
+                <a:ea typeface="맑은 고딕"/>
+                <a:cs typeface="맑은 고딕"/>
               </a:rPr>
               <a:t>오늘 완성한 챗봇 서비스에 대규모 트래픽을 흘려보내, K8s가 스스로 Pod를 늘리고(HPA) 장애를 스스로 복구하는(자가치유) 모습을 직접 관찰합니다.</a:t>
             </a:r>
@@ -6686,6 +6758,8 @@
                   <a:srgbClr val="14B8A6"/>
                 </a:solidFill>
                 <a:latin typeface="맑은 고딕"/>
+                <a:ea typeface="맑은 고딕"/>
+                <a:cs typeface="맑은 고딕"/>
               </a:rPr>
               <a:t>13주차를 마치며</a:t>
             </a:r>
@@ -6721,6 +6795,8 @@
                   <a:srgbClr val="FFFFFF"/>
                 </a:solidFill>
                 <a:latin typeface="맑은 고딕"/>
+                <a:ea typeface="맑은 고딕"/>
+                <a:cs typeface="맑은 고딕"/>
               </a:rPr>
               <a:t>수고하셨습니다!</a:t>
             </a:r>
@@ -6760,6 +6836,8 @@
                   <a:srgbClr val="C9D3E6"/>
                 </a:solidFill>
                 <a:latin typeface="맑은 고딕"/>
+                <a:ea typeface="맑은 고딕"/>
+                <a:cs typeface="맑은 고딕"/>
               </a:rPr>
               <a:t>Git부터 K8s까지 이어지는 완전 자동화 파이프라인을 직접 완성하셨습니다. 이 과목에서 가장 큰 산을 넘으셨습니다.</a:t>
             </a:r>
@@ -6901,6 +6979,8 @@
                   <a:srgbClr val="14B8A6"/>
                 </a:solidFill>
                 <a:latin typeface="맑은 고딕"/>
+                <a:ea typeface="맑은 고딕"/>
+                <a:cs typeface="맑은 고딕"/>
               </a:rPr>
               <a:t>SESSION OVERVIEW</a:t>
             </a:r>
@@ -6936,6 +7016,8 @@
                   <a:srgbClr val="FFFFFF"/>
                 </a:solidFill>
                 <a:latin typeface="맑은 고딕"/>
+                <a:ea typeface="맑은 고딕"/>
+                <a:cs typeface="맑은 고딕"/>
               </a:rPr>
               <a:t>오늘의 학습 목표</a:t>
             </a:r>
@@ -6975,6 +7057,8 @@
                   <a:srgbClr val="222733"/>
                 </a:solidFill>
                 <a:latin typeface="맑은 고딕"/>
+                <a:ea typeface="맑은 고딕"/>
+                <a:cs typeface="맑은 고딕"/>
               </a:rPr>
               <a:t>1.  Poll SCM으로 전체 파이프라인이 자동 실행되는 것을 End-to-End로 검증한다</a:t>
             </a:r>
@@ -6991,6 +7075,8 @@
                   <a:srgbClr val="222733"/>
                 </a:solidFill>
                 <a:latin typeface="맑은 고딕"/>
+                <a:ea typeface="맑은 고딕"/>
+                <a:cs typeface="맑은 고딕"/>
               </a:rPr>
               <a:t>2.  파이프라인 실패 시 어느 Stage에서 문제가 생겼는지 스스로 진단한다</a:t>
             </a:r>
@@ -7007,6 +7093,8 @@
                   <a:srgbClr val="222733"/>
                 </a:solidFill>
                 <a:latin typeface="맑은 고딕"/>
+                <a:ea typeface="맑은 고딕"/>
+                <a:cs typeface="맑은 고딕"/>
               </a:rPr>
               <a:t>3.  13주차 전체 실습을 통해 완성한 파이프라인을 정리하고 회고한다</a:t>
             </a:r>
@@ -7042,6 +7130,8 @@
                   <a:srgbClr val="5B6373"/>
                 </a:solidFill>
                 <a:latin typeface="맑은 고딕"/>
+                <a:ea typeface="맑은 고딕"/>
+                <a:cs typeface="맑은 고딕"/>
               </a:rPr>
               <a:t>클라우드인프라관리  ·  13주차 3차시 [VM 전용]</a:t>
             </a:r>
@@ -7077,6 +7167,8 @@
                   <a:srgbClr val="5B6373"/>
                 </a:solidFill>
                 <a:latin typeface="맑은 고딕"/>
+                <a:ea typeface="맑은 고딕"/>
+                <a:cs typeface="맑은 고딕"/>
               </a:rPr>
               <a:t>02 / 13</a:t>
             </a:r>
@@ -7262,6 +7354,8 @@
                   <a:srgbClr val="14B8A6"/>
                 </a:solidFill>
                 <a:latin typeface="맑은 고딕"/>
+                <a:ea typeface="맑은 고딕"/>
+                <a:cs typeface="맑은 고딕"/>
               </a:rPr>
               <a:t>SESSION OVERVIEW</a:t>
             </a:r>
@@ -7297,6 +7391,8 @@
                   <a:srgbClr val="FFFFFF"/>
                 </a:solidFill>
                 <a:latin typeface="맑은 고딕"/>
+                <a:ea typeface="맑은 고딕"/>
+                <a:cs typeface="맑은 고딕"/>
               </a:rPr>
               <a:t>오늘의 진행 순서 (Killercoda 없음)</a:t>
             </a:r>
@@ -7464,6 +7560,8 @@
                   <a:srgbClr val="FFFFFF"/>
                 </a:solidFill>
                 <a:latin typeface="맑은 고딕"/>
+                <a:ea typeface="맑은 고딕"/>
+                <a:cs typeface="맑은 고딕"/>
               </a:rPr>
               <a:t>1</a:t>
             </a:r>
@@ -7547,6 +7645,8 @@
                   <a:srgbClr val="14213D"/>
                 </a:solidFill>
                 <a:latin typeface="맑은 고딕"/>
+                <a:ea typeface="맑은 고딕"/>
+                <a:cs typeface="맑은 고딕"/>
               </a:rPr>
               <a:t>개념 설명</a:t>
             </a:r>
@@ -7586,6 +7686,8 @@
                   <a:srgbClr val="222733"/>
                 </a:solidFill>
                 <a:latin typeface="맑은 고딕"/>
+                <a:ea typeface="맑은 고딕"/>
+                <a:cs typeface="맑은 고딕"/>
               </a:rPr>
               <a:t>트러블슈팅 체크리스트</a:t>
             </a:r>
@@ -7665,6 +7767,8 @@
                   <a:srgbClr val="FFFFFF"/>
                 </a:solidFill>
                 <a:latin typeface="맑은 고딕"/>
+                <a:ea typeface="맑은 고딕"/>
+                <a:cs typeface="맑은 고딕"/>
               </a:rPr>
               <a:t>2</a:t>
             </a:r>
@@ -7748,6 +7852,8 @@
                   <a:srgbClr val="14213D"/>
                 </a:solidFill>
                 <a:latin typeface="맑은 고딕"/>
+                <a:ea typeface="맑은 고딕"/>
+                <a:cs typeface="맑은 고딕"/>
               </a:rPr>
               <a:t>VM 실습</a:t>
             </a:r>
@@ -7787,6 +7893,8 @@
                   <a:srgbClr val="222733"/>
                 </a:solidFill>
                 <a:latin typeface="맑은 고딕"/>
+                <a:ea typeface="맑은 고딕"/>
+                <a:cs typeface="맑은 고딕"/>
               </a:rPr>
               <a:t>E2E 테스트+트러블슈팅</a:t>
             </a:r>
@@ -7866,6 +7974,8 @@
                   <a:srgbClr val="FFFFFF"/>
                 </a:solidFill>
                 <a:latin typeface="맑은 고딕"/>
+                <a:ea typeface="맑은 고딕"/>
+                <a:cs typeface="맑은 고딕"/>
               </a:rPr>
               <a:t>3</a:t>
             </a:r>
@@ -7949,6 +8059,8 @@
                   <a:srgbClr val="14213D"/>
                 </a:solidFill>
                 <a:latin typeface="맑은 고딕"/>
+                <a:ea typeface="맑은 고딕"/>
+                <a:cs typeface="맑은 고딕"/>
               </a:rPr>
               <a:t>결과 정리</a:t>
             </a:r>
@@ -7988,6 +8100,8 @@
                   <a:srgbClr val="222733"/>
                 </a:solidFill>
                 <a:latin typeface="맑은 고딕"/>
+                <a:ea typeface="맑은 고딕"/>
+                <a:cs typeface="맑은 고딕"/>
               </a:rPr>
               <a:t>13주차 종합 제출</a:t>
             </a:r>
@@ -8023,6 +8137,8 @@
                   <a:srgbClr val="5B6373"/>
                 </a:solidFill>
                 <a:latin typeface="맑은 고딕"/>
+                <a:ea typeface="맑은 고딕"/>
+                <a:cs typeface="맑은 고딕"/>
               </a:rPr>
               <a:t>클라우드인프라관리  ·  13주차 3차시 [VM 전용]</a:t>
             </a:r>
@@ -8058,6 +8174,8 @@
                   <a:srgbClr val="5B6373"/>
                 </a:solidFill>
                 <a:latin typeface="맑은 고딕"/>
+                <a:ea typeface="맑은 고딕"/>
+                <a:cs typeface="맑은 고딕"/>
               </a:rPr>
               <a:t>03 / 13</a:t>
             </a:r>
@@ -8261,6 +8379,8 @@
                   <a:srgbClr val="14213D"/>
                 </a:solidFill>
                 <a:latin typeface="맑은 고딕"/>
+                <a:ea typeface="맑은 고딕"/>
+                <a:cs typeface="맑은 고딕"/>
               </a:rPr>
               <a:t>PART 01</a:t>
             </a:r>
@@ -8296,6 +8416,8 @@
                   <a:srgbClr val="FFFFFF"/>
                 </a:solidFill>
                 <a:latin typeface="맑은 고딕"/>
+                <a:ea typeface="맑은 고딕"/>
+                <a:cs typeface="맑은 고딕"/>
               </a:rPr>
               <a:t>End-to-End 테스트란?</a:t>
             </a:r>
@@ -8331,6 +8453,8 @@
                   <a:srgbClr val="C9D3E6"/>
                 </a:solidFill>
                 <a:latin typeface="맑은 고딕"/>
+                <a:ea typeface="맑은 고딕"/>
+                <a:cs typeface="맑은 고딕"/>
               </a:rPr>
               <a:t>파이프라인의 처음부터 끝까지를 실제로 확인한다</a:t>
             </a:r>
@@ -8490,6 +8614,8 @@
                   <a:srgbClr val="14213D"/>
                 </a:solidFill>
                 <a:latin typeface="맑은 고딕"/>
+                <a:ea typeface="맑은 고딕"/>
+                <a:cs typeface="맑은 고딕"/>
               </a:rPr>
               <a:t>01</a:t>
             </a:r>
@@ -8525,6 +8651,8 @@
                   <a:srgbClr val="14B8A6"/>
                 </a:solidFill>
                 <a:latin typeface="맑은 고딕"/>
+                <a:ea typeface="맑은 고딕"/>
+                <a:cs typeface="맑은 고딕"/>
               </a:rPr>
               <a:t>PART 1 · E2E 테스트</a:t>
             </a:r>
@@ -8560,6 +8688,8 @@
                   <a:srgbClr val="FFFFFF"/>
                 </a:solidFill>
                 <a:latin typeface="맑은 고딕"/>
+                <a:ea typeface="맑은 고딕"/>
+                <a:cs typeface="맑은 고딕"/>
               </a:rPr>
               <a:t>지금까지는 '조립'했다면, 오늘은 '작동 확인'</a:t>
             </a:r>
@@ -8599,6 +8729,8 @@
                   <a:srgbClr val="0D9488"/>
                 </a:solidFill>
                 <a:latin typeface="맑은 고딕"/>
+                <a:ea typeface="맑은 고딕"/>
+                <a:cs typeface="맑은 고딕"/>
               </a:rPr>
               <a:t>●  </a:t>
             </a:r>
@@ -8608,6 +8740,8 @@
                   <a:srgbClr val="222733"/>
                 </a:solidFill>
                 <a:latin typeface="맑은 고딕"/>
+                <a:ea typeface="맑은 고딕"/>
+                <a:cs typeface="맑은 고딕"/>
               </a:rPr>
               <a:t>2차시까지는 Build Now로 각 단계가 개별적으로 성공하는지 확인했음</a:t>
             </a:r>
@@ -8624,6 +8758,8 @@
                   <a:srgbClr val="0D9488"/>
                 </a:solidFill>
                 <a:latin typeface="맑은 고딕"/>
+                <a:ea typeface="맑은 고딕"/>
+                <a:cs typeface="맑은 고딕"/>
               </a:rPr>
               <a:t>●  </a:t>
             </a:r>
@@ -8633,6 +8769,8 @@
                   <a:srgbClr val="222733"/>
                 </a:solidFill>
                 <a:latin typeface="맑은 고딕"/>
+                <a:ea typeface="맑은 고딕"/>
+                <a:cs typeface="맑은 고딕"/>
               </a:rPr>
               <a:t>오늘은 사람이 버튼을 누르지 않고, 코드 수정 → git push만으로 전체가 저절로 돌아가는지 확인</a:t>
             </a:r>
@@ -8649,6 +8787,8 @@
                   <a:srgbClr val="0D9488"/>
                 </a:solidFill>
                 <a:latin typeface="맑은 고딕"/>
+                <a:ea typeface="맑은 고딕"/>
+                <a:cs typeface="맑은 고딕"/>
               </a:rPr>
               <a:t>●  </a:t>
             </a:r>
@@ -8658,6 +8798,8 @@
                   <a:srgbClr val="222733"/>
                 </a:solidFill>
                 <a:latin typeface="맑은 고딕"/>
+                <a:ea typeface="맑은 고딕"/>
+                <a:cs typeface="맑은 고딕"/>
               </a:rPr>
               <a:t>이 흐름이 실제로 성공하면, 진짜 자동 배포 파이프라인이 완성된 것</a:t>
             </a:r>
@@ -8737,6 +8879,8 @@
                   <a:srgbClr val="FFFFFF"/>
                 </a:solidFill>
                 <a:latin typeface="맑은 고딕"/>
+                <a:ea typeface="맑은 고딕"/>
+                <a:cs typeface="맑은 고딕"/>
               </a:rPr>
               <a:t>🎯  오늘의 최종 목표</a:t>
             </a:r>
@@ -8772,6 +8916,8 @@
                   <a:srgbClr val="FFFFFF"/>
                 </a:solidFill>
                 <a:latin typeface="맑은 고딕"/>
+                <a:ea typeface="맑은 고딕"/>
+                <a:cs typeface="맑은 고딕"/>
               </a:rPr>
               <a:t>app.py 문구 하나를 바꾸고 push했을 때, 실제 챗봇 응답이 바뀌는 것까지 직접 확인</a:t>
             </a:r>
@@ -8807,6 +8953,8 @@
                   <a:srgbClr val="5B6373"/>
                 </a:solidFill>
                 <a:latin typeface="맑은 고딕"/>
+                <a:ea typeface="맑은 고딕"/>
+                <a:cs typeface="맑은 고딕"/>
               </a:rPr>
               <a:t>클라우드인프라관리  ·  13주차 3차시 [VM 전용]</a:t>
             </a:r>
@@ -8842,6 +8990,8 @@
                   <a:srgbClr val="5B6373"/>
                 </a:solidFill>
                 <a:latin typeface="맑은 고딕"/>
+                <a:ea typeface="맑은 고딕"/>
+                <a:cs typeface="맑은 고딕"/>
               </a:rPr>
               <a:t>05 / 13</a:t>
             </a:r>
@@ -9045,6 +9195,8 @@
                   <a:srgbClr val="14213D"/>
                 </a:solidFill>
                 <a:latin typeface="맑은 고딕"/>
+                <a:ea typeface="맑은 고딕"/>
+                <a:cs typeface="맑은 고딕"/>
               </a:rPr>
               <a:t>PART 02</a:t>
             </a:r>
@@ -9080,6 +9232,8 @@
                   <a:srgbClr val="FFFFFF"/>
                 </a:solidFill>
                 <a:latin typeface="맑은 고딕"/>
+                <a:ea typeface="맑은 고딕"/>
+                <a:cs typeface="맑은 고딕"/>
               </a:rPr>
               <a:t>트러블슈팅 체크리스트</a:t>
             </a:r>
@@ -9115,6 +9269,8 @@
                   <a:srgbClr val="C9D3E6"/>
                 </a:solidFill>
                 <a:latin typeface="맑은 고딕"/>
+                <a:ea typeface="맑은 고딕"/>
+                <a:cs typeface="맑은 고딕"/>
               </a:rPr>
               <a:t>막히면 순서대로 확인한다</a:t>
             </a:r>
@@ -9274,6 +9430,8 @@
                   <a:srgbClr val="14213D"/>
                 </a:solidFill>
                 <a:latin typeface="맑은 고딕"/>
+                <a:ea typeface="맑은 고딕"/>
+                <a:cs typeface="맑은 고딕"/>
               </a:rPr>
               <a:t>02</a:t>
             </a:r>
@@ -9309,6 +9467,8 @@
                   <a:srgbClr val="14B8A6"/>
                 </a:solidFill>
                 <a:latin typeface="맑은 고딕"/>
+                <a:ea typeface="맑은 고딕"/>
+                <a:cs typeface="맑은 고딕"/>
               </a:rPr>
               <a:t>PART 2 · 트러블슈팅</a:t>
             </a:r>
@@ -9344,6 +9504,8 @@
                   <a:srgbClr val="FFFFFF"/>
                 </a:solidFill>
                 <a:latin typeface="맑은 고딕"/>
+                <a:ea typeface="맑은 고딕"/>
+                <a:cs typeface="맑은 고딕"/>
               </a:rPr>
               <a:t>Stage별 자주 발생하는 문제</a:t>
             </a:r>
@@ -9423,6 +9585,8 @@
                   <a:srgbClr val="FFFFFF"/>
                 </a:solidFill>
                 <a:latin typeface="맑은 고딕"/>
+                <a:ea typeface="맑은 고딕"/>
+                <a:cs typeface="맑은 고딕"/>
               </a:rPr>
               <a:t>Stage</a:t>
             </a:r>
@@ -9502,6 +9666,8 @@
                   <a:srgbClr val="FFFFFF"/>
                 </a:solidFill>
                 <a:latin typeface="맑은 고딕"/>
+                <a:ea typeface="맑은 고딕"/>
+                <a:cs typeface="맑은 고딕"/>
               </a:rPr>
               <a:t>자주 발생하는 원인</a:t>
             </a:r>
@@ -9581,6 +9747,8 @@
                   <a:srgbClr val="14213D"/>
                 </a:solidFill>
                 <a:latin typeface="맑은 고딕"/>
+                <a:ea typeface="맑은 고딕"/>
+                <a:cs typeface="맑은 고딕"/>
               </a:rPr>
               <a:t>Checkout</a:t>
             </a:r>
@@ -9660,6 +9828,8 @@
                   <a:srgbClr val="222733"/>
                 </a:solidFill>
                 <a:latin typeface="맑은 고딕"/>
+                <a:ea typeface="맑은 고딕"/>
+                <a:cs typeface="맑은 고딕"/>
               </a:rPr>
               <a:t>저장소 URL 오타, 저장소가 Private으로 설정됨</a:t>
             </a:r>
@@ -9739,6 +9909,8 @@
                   <a:srgbClr val="14213D"/>
                 </a:solidFill>
                 <a:latin typeface="맑은 고딕"/>
+                <a:ea typeface="맑은 고딕"/>
+                <a:cs typeface="맑은 고딕"/>
               </a:rPr>
               <a:t>Build</a:t>
             </a:r>
@@ -9818,6 +9990,8 @@
                   <a:srgbClr val="222733"/>
                 </a:solidFill>
                 <a:latin typeface="맑은 고딕"/>
+                <a:ea typeface="맑은 고딕"/>
+                <a:cs typeface="맑은 고딕"/>
               </a:rPr>
               <a:t>Dockerfile 문법 오류, 이미지 이름에 오타</a:t>
             </a:r>
@@ -9897,6 +10071,8 @@
                   <a:srgbClr val="14213D"/>
                 </a:solidFill>
                 <a:latin typeface="맑은 고딕"/>
+                <a:ea typeface="맑은 고딕"/>
+                <a:cs typeface="맑은 고딕"/>
               </a:rPr>
               <a:t>Push</a:t>
             </a:r>
@@ -9976,6 +10152,8 @@
                   <a:srgbClr val="222733"/>
                 </a:solidFill>
                 <a:latin typeface="맑은 고딕"/>
+                <a:ea typeface="맑은 고딕"/>
+                <a:cs typeface="맑은 고딕"/>
               </a:rPr>
               <a:t>dockerhub-cred 미등록, Docker Hub 아이디 오타</a:t>
             </a:r>
@@ -10055,6 +10233,8 @@
                   <a:srgbClr val="14213D"/>
                 </a:solidFill>
                 <a:latin typeface="맑은 고딕"/>
+                <a:ea typeface="맑은 고딕"/>
+                <a:cs typeface="맑은 고딕"/>
               </a:rPr>
               <a:t>Deploy</a:t>
             </a:r>
@@ -10134,6 +10314,8 @@
                   <a:srgbClr val="222733"/>
                 </a:solidFill>
                 <a:latin typeface="맑은 고딕"/>
+                <a:ea typeface="맑은 고딕"/>
+                <a:cs typeface="맑은 고딕"/>
               </a:rPr>
               <a:t>Deployment/컨테이너 이름 불일치, minikube 미실행</a:t>
             </a:r>
@@ -10169,6 +10351,8 @@
                   <a:srgbClr val="5B6373"/>
                 </a:solidFill>
                 <a:latin typeface="맑은 고딕"/>
+                <a:ea typeface="맑은 고딕"/>
+                <a:cs typeface="맑은 고딕"/>
               </a:rPr>
               <a:t>클라우드인프라관리  ·  13주차 3차시 [VM 전용]</a:t>
             </a:r>
@@ -10204,6 +10388,8 @@
                   <a:srgbClr val="5B6373"/>
                 </a:solidFill>
                 <a:latin typeface="맑은 고딕"/>
+                <a:ea typeface="맑은 고딕"/>
+                <a:cs typeface="맑은 고딕"/>
               </a:rPr>
               <a:t>07 / 13</a:t>
             </a:r>
@@ -10407,6 +10593,8 @@
                   <a:srgbClr val="14213D"/>
                 </a:solidFill>
                 <a:latin typeface="맑은 고딕"/>
+                <a:ea typeface="맑은 고딕"/>
+                <a:cs typeface="맑은 고딕"/>
               </a:rPr>
               <a:t>02</a:t>
             </a:r>
@@ -10442,6 +10630,8 @@
                   <a:srgbClr val="14B8A6"/>
                 </a:solidFill>
                 <a:latin typeface="맑은 고딕"/>
+                <a:ea typeface="맑은 고딕"/>
+                <a:cs typeface="맑은 고딕"/>
               </a:rPr>
               <a:t>PART 2 · 트러블슈팅</a:t>
             </a:r>
@@ -10477,6 +10667,8 @@
                   <a:srgbClr val="FFFFFF"/>
                 </a:solidFill>
                 <a:latin typeface="맑은 고딕"/>
+                <a:ea typeface="맑은 고딕"/>
+                <a:cs typeface="맑은 고딕"/>
               </a:rPr>
               <a:t>진단 순서 — Console Output부터</a:t>
             </a:r>
@@ -10516,6 +10708,8 @@
                   <a:srgbClr val="0D9488"/>
                 </a:solidFill>
                 <a:latin typeface="맑은 고딕"/>
+                <a:ea typeface="맑은 고딕"/>
+                <a:cs typeface="맑은 고딕"/>
               </a:rPr>
               <a:t>●  </a:t>
             </a:r>
@@ -10525,6 +10719,8 @@
                   <a:srgbClr val="222733"/>
                 </a:solidFill>
                 <a:latin typeface="맑은 고딕"/>
+                <a:ea typeface="맑은 고딕"/>
+                <a:cs typeface="맑은 고딕"/>
               </a:rPr>
               <a:t>Jenkins Job의 Console Output에서 빨간 글씨(오류 메시지)를 먼저 읽기</a:t>
             </a:r>
@@ -10541,6 +10737,8 @@
                   <a:srgbClr val="0D9488"/>
                 </a:solidFill>
                 <a:latin typeface="맑은 고딕"/>
+                <a:ea typeface="맑은 고딕"/>
+                <a:cs typeface="맑은 고딕"/>
               </a:rPr>
               <a:t>●  </a:t>
             </a:r>
@@ -10550,6 +10748,8 @@
                   <a:srgbClr val="222733"/>
                 </a:solidFill>
                 <a:latin typeface="맑은 고딕"/>
+                <a:ea typeface="맑은 고딕"/>
+                <a:cs typeface="맑은 고딕"/>
               </a:rPr>
               <a:t>어느 stage에서 멈췄는지 Stage View 색깔로 확인</a:t>
             </a:r>
@@ -10566,6 +10766,8 @@
                   <a:srgbClr val="0D9488"/>
                 </a:solidFill>
                 <a:latin typeface="맑은 고딕"/>
+                <a:ea typeface="맑은 고딕"/>
+                <a:cs typeface="맑은 고딕"/>
               </a:rPr>
               <a:t>●  </a:t>
             </a:r>
@@ -10575,6 +10777,8 @@
                   <a:srgbClr val="222733"/>
                 </a:solidFill>
                 <a:latin typeface="맑은 고딕"/>
+                <a:ea typeface="맑은 고딕"/>
+                <a:cs typeface="맑은 고딕"/>
               </a:rPr>
               <a:t>오류 메시지를 그대로 검색하거나, VM에서 같은 명령을 손으로 직접 실행해 원인 재현</a:t>
             </a:r>
@@ -10610,6 +10814,8 @@
                   <a:srgbClr val="5B6373"/>
                 </a:solidFill>
                 <a:latin typeface="맑은 고딕"/>
+                <a:ea typeface="맑은 고딕"/>
+                <a:cs typeface="맑은 고딕"/>
               </a:rPr>
               <a:t>클라우드인프라관리  ·  13주차 3차시 [VM 전용]</a:t>
             </a:r>
@@ -10645,6 +10851,8 @@
                   <a:srgbClr val="5B6373"/>
                 </a:solidFill>
                 <a:latin typeface="맑은 고딕"/>
+                <a:ea typeface="맑은 고딕"/>
+                <a:cs typeface="맑은 고딕"/>
               </a:rPr>
               <a:t>08 / 13</a:t>
             </a:r>
@@ -10848,6 +11056,8 @@
                   <a:srgbClr val="14213D"/>
                 </a:solidFill>
                 <a:latin typeface="맑은 고딕"/>
+                <a:ea typeface="맑은 고딕"/>
+                <a:cs typeface="맑은 고딕"/>
               </a:rPr>
               <a:t>03</a:t>
             </a:r>
@@ -10883,6 +11093,8 @@
                   <a:srgbClr val="14B8A6"/>
                 </a:solidFill>
                 <a:latin typeface="맑은 고딕"/>
+                <a:ea typeface="맑은 고딕"/>
+                <a:cs typeface="맑은 고딕"/>
               </a:rPr>
               <a:t>실습 안내</a:t>
             </a:r>
@@ -10918,6 +11130,8 @@
                   <a:srgbClr val="FFFFFF"/>
                 </a:solidFill>
                 <a:latin typeface="맑은 고딕"/>
+                <a:ea typeface="맑은 고딕"/>
+                <a:cs typeface="맑은 고딕"/>
               </a:rPr>
               <a:t>VM 실습 — E2E 테스트</a:t>
             </a:r>
@@ -10957,6 +11171,8 @@
                   <a:srgbClr val="0D9488"/>
                 </a:solidFill>
                 <a:latin typeface="맑은 고딕"/>
+                <a:ea typeface="맑은 고딕"/>
+                <a:cs typeface="맑은 고딕"/>
               </a:rPr>
               <a:t>●  </a:t>
             </a:r>
@@ -10966,6 +11182,8 @@
                   <a:srgbClr val="222733"/>
                 </a:solidFill>
                 <a:latin typeface="맑은 고딕"/>
+                <a:ea typeface="맑은 고딕"/>
+                <a:cs typeface="맑은 고딕"/>
               </a:rPr>
               <a:t>app.py의 챗봇 응답 문구를 한 줄 수정</a:t>
             </a:r>
@@ -10982,6 +11200,8 @@
                   <a:srgbClr val="0D9488"/>
                 </a:solidFill>
                 <a:latin typeface="맑은 고딕"/>
+                <a:ea typeface="맑은 고딕"/>
+                <a:cs typeface="맑은 고딕"/>
               </a:rPr>
               <a:t>●  </a:t>
             </a:r>
@@ -10991,6 +11211,8 @@
                   <a:srgbClr val="222733"/>
                 </a:solidFill>
                 <a:latin typeface="맑은 고딕"/>
+                <a:ea typeface="맑은 고딕"/>
+                <a:cs typeface="맑은 고딕"/>
               </a:rPr>
               <a:t>git push origin main 실행 후, 아무것도 누르지 않고 최대 1~2분 대기</a:t>
             </a:r>
@@ -11007,6 +11229,8 @@
                   <a:srgbClr val="0D9488"/>
                 </a:solidFill>
                 <a:latin typeface="맑은 고딕"/>
+                <a:ea typeface="맑은 고딕"/>
+                <a:cs typeface="맑은 고딕"/>
               </a:rPr>
               <a:t>●  </a:t>
             </a:r>
@@ -11016,6 +11240,8 @@
                   <a:srgbClr val="222733"/>
                 </a:solidFill>
                 <a:latin typeface="맑은 고딕"/>
+                <a:ea typeface="맑은 고딕"/>
+                <a:cs typeface="맑은 고딕"/>
               </a:rPr>
               <a:t>Jenkins Build History에 자동 빌드가 새로 생기는지 확인</a:t>
             </a:r>
@@ -11032,6 +11258,8 @@
                   <a:srgbClr val="0D9488"/>
                 </a:solidFill>
                 <a:latin typeface="맑은 고딕"/>
+                <a:ea typeface="맑은 고딕"/>
+                <a:cs typeface="맑은 고딕"/>
               </a:rPr>
               <a:t>●  </a:t>
             </a:r>
@@ -11041,6 +11269,8 @@
                   <a:srgbClr val="222733"/>
                 </a:solidFill>
                 <a:latin typeface="맑은 고딕"/>
+                <a:ea typeface="맑은 고딕"/>
+                <a:cs typeface="맑은 고딕"/>
               </a:rPr>
               <a:t>빌드 성공 후 curl $(minikube service chatbot --url) 로 실제 응답이 바뀐 것 확인</a:t>
             </a:r>
@@ -11076,6 +11306,8 @@
                   <a:srgbClr val="5B6373"/>
                 </a:solidFill>
                 <a:latin typeface="맑은 고딕"/>
+                <a:ea typeface="맑은 고딕"/>
+                <a:cs typeface="맑은 고딕"/>
               </a:rPr>
               <a:t>클라우드인프라관리  ·  13주차 3차시 [VM 전용]</a:t>
             </a:r>
@@ -11111,6 +11343,8 @@
                   <a:srgbClr val="5B6373"/>
                 </a:solidFill>
                 <a:latin typeface="맑은 고딕"/>
+                <a:ea typeface="맑은 고딕"/>
+                <a:cs typeface="맑은 고딕"/>
               </a:rPr>
               <a:t>09 / 13</a:t>
             </a:r>
